--- a/presentation/Presentazione_Capstone_Traffic.pptx
+++ b/presentation/Presentazione_Capstone_Traffic.pptx
@@ -3847,28 +3847,6 @@
           <a:chExt cx="0" cy="0"/>
         </a:xfrm>
       </p:grpSpPr>
-      <p:sp>
-        <p:nvSpPr>
-          <p:cNvPr id="2" name="Shape 0"/>
-          <p:cNvSpPr/>
-          <p:nvPr/>
-        </p:nvSpPr>
-        <p:spPr>
-          <a:xfrm>
-            <a:off x="-2011680" y="4206240"/>
-            <a:ext cx="5852160" cy="5852160"/>
-          </a:xfrm>
-          <a:prstGeom prst="ellipse">
-            <a:avLst/>
-          </a:prstGeom>
-          <a:solidFill>
-            <a:srgbClr val="1C2836">
-              <a:alpha val="55000"/>
-            </a:srgbClr>
-          </a:solidFill>
-          <a:ln/>
-        </p:spPr>
-      </p:sp>
       <p:sp>
         <p:nvSpPr>
           <p:cNvPr id="3" name="Text 1"/>
